--- a/ClassMaterials/UsingObjectsAndAPIs/Slides/Part1-Strings.pptx
+++ b/ClassMaterials/UsingObjectsAndAPIs/Slides/Part1-Strings.pptx
@@ -5,19 +5,21 @@
     <p:sldMasterId id="2147483927" r:id="rId4"/>
   </p:sldMasterIdLst>
   <p:notesMasterIdLst>
-    <p:notesMasterId r:id="rId12"/>
+    <p:notesMasterId r:id="rId14"/>
   </p:notesMasterIdLst>
   <p:handoutMasterIdLst>
-    <p:handoutMasterId r:id="rId13"/>
+    <p:handoutMasterId r:id="rId15"/>
   </p:handoutMasterIdLst>
   <p:sldIdLst>
     <p:sldId id="300" r:id="rId5"/>
     <p:sldId id="259" r:id="rId6"/>
-    <p:sldId id="261" r:id="rId7"/>
-    <p:sldId id="343" r:id="rId8"/>
-    <p:sldId id="344" r:id="rId9"/>
-    <p:sldId id="342" r:id="rId10"/>
-    <p:sldId id="345" r:id="rId11"/>
+    <p:sldId id="346" r:id="rId7"/>
+    <p:sldId id="261" r:id="rId8"/>
+    <p:sldId id="347" r:id="rId9"/>
+    <p:sldId id="343" r:id="rId10"/>
+    <p:sldId id="344" r:id="rId11"/>
+    <p:sldId id="342" r:id="rId12"/>
+    <p:sldId id="345" r:id="rId13"/>
   </p:sldIdLst>
   <p:sldSz cx="9144000" cy="6858000" type="screen4x3"/>
   <p:notesSz cx="7010400" cy="9296400"/>
@@ -297,7 +299,7 @@
               <a:pPr>
                 <a:defRPr/>
               </a:pPr>
-              <a:t>9/9/2026</a:t>
+              <a:t>9/11/2026</a:t>
             </a:fld>
             <a:endParaRPr lang="en-US"/>
           </a:p>
@@ -532,7 +534,7 @@
               <a:pPr>
                 <a:defRPr/>
               </a:pPr>
-              <a:t>9/9/2026</a:t>
+              <a:t>9/11/2026</a:t>
             </a:fld>
             <a:endParaRPr lang="en-US"/>
           </a:p>
@@ -1119,7 +1121,7 @@
       </p:grpSpPr>
       <p:sp>
         <p:nvSpPr>
-          <p:cNvPr id="77" name="Shape 77"/>
+          <p:cNvPr id="2" name="Slide Image Placeholder 1"/>
           <p:cNvSpPr>
             <a:spLocks noGrp="1" noRot="1" noChangeAspect="1"/>
           </p:cNvSpPr>
@@ -1127,285 +1129,72 @@
             <p:ph type="sldImg"/>
           </p:nvPr>
         </p:nvSpPr>
-        <p:spPr>
-          <a:prstGeom prst="rect">
-            <a:avLst/>
-          </a:prstGeom>
-        </p:spPr>
+        <p:spPr/>
+      </p:sp>
+      <p:sp>
+        <p:nvSpPr>
+          <p:cNvPr id="3" name="Notes Placeholder 2"/>
+          <p:cNvSpPr>
+            <a:spLocks noGrp="1"/>
+          </p:cNvSpPr>
+          <p:nvPr>
+            <p:ph type="body" idx="1"/>
+          </p:nvPr>
+        </p:nvSpPr>
+        <p:spPr/>
         <p:txBody>
           <a:bodyPr/>
           <a:lstStyle/>
           <a:p>
-            <a:pPr lvl="0"/>
-            <a:endParaRPr/>
-          </a:p>
-        </p:txBody>
-      </p:sp>
-      <p:sp>
-        <p:nvSpPr>
-          <p:cNvPr id="78" name="Shape 78"/>
-          <p:cNvSpPr>
-            <a:spLocks noGrp="1"/>
-          </p:cNvSpPr>
-          <p:nvPr>
-            <p:ph type="body" sz="quarter" idx="1"/>
-          </p:nvPr>
-        </p:nvSpPr>
-        <p:spPr>
-          <a:prstGeom prst="rect">
-            <a:avLst/>
-          </a:prstGeom>
-        </p:spPr>
+            <a:r>
+              <a:rPr lang="en-US" dirty="0"/>
+              <a:t>Image source: https://www.pinterest.com/pin/beads-kit-and-300pcs-alphabet-letter-beads-for-name-bracelets-etsy-in-2022--1121818588404789699/</a:t>
+            </a:r>
+          </a:p>
+          <a:p>
+            <a:endParaRPr lang="en-US" dirty="0"/>
+          </a:p>
+          <a:p>
+            <a:r>
+              <a:rPr lang="en-US" dirty="0"/>
+              <a:t>For the real etymology, see https://en.wikipedia.org/wiki/String_(computer_science)#History</a:t>
+            </a:r>
+          </a:p>
+        </p:txBody>
+      </p:sp>
+      <p:sp>
+        <p:nvSpPr>
+          <p:cNvPr id="4" name="Slide Number Placeholder 3"/>
+          <p:cNvSpPr>
+            <a:spLocks noGrp="1"/>
+          </p:cNvSpPr>
+          <p:nvPr>
+            <p:ph type="sldNum" sz="quarter" idx="5"/>
+          </p:nvPr>
+        </p:nvSpPr>
+        <p:spPr/>
         <p:txBody>
           <a:bodyPr/>
           <a:lstStyle/>
           <a:p>
-            <a:pPr lvl="0" defTabSz="914400">
-              <a:lnSpc>
-                <a:spcPct val="100000"/>
-              </a:lnSpc>
-              <a:spcBef>
-                <a:spcPts val="800"/>
-              </a:spcBef>
-              <a:defRPr sz="1800"/>
-            </a:pPr>
-            <a:r>
-              <a:rPr sz="2300">
-                <a:latin typeface="Calibri"/>
-                <a:ea typeface="Calibri"/>
-                <a:cs typeface="Calibri"/>
-                <a:sym typeface="Calibri"/>
-              </a:rPr>
-              <a:t>Find the documentation for the </a:t>
-            </a:r>
-            <a:r>
-              <a:rPr sz="2300" b="1">
-                <a:latin typeface="Calibri"/>
-                <a:ea typeface="Calibri"/>
-                <a:cs typeface="Calibri"/>
-                <a:sym typeface="Calibri"/>
-              </a:rPr>
-              <a:t>String</a:t>
-            </a:r>
-            <a:r>
-              <a:rPr sz="2300">
-                <a:latin typeface="Calibri"/>
-                <a:ea typeface="Calibri"/>
-                <a:cs typeface="Calibri"/>
-                <a:sym typeface="Calibri"/>
-              </a:rPr>
-              <a:t> class from one of the above links, as follows:</a:t>
-            </a:r>
-            <a:endParaRPr sz="1200">
-              <a:latin typeface="Calibri"/>
-              <a:ea typeface="Calibri"/>
-              <a:cs typeface="Calibri"/>
-              <a:sym typeface="Calibri"/>
-            </a:endParaRPr>
-          </a:p>
-          <a:p>
-            <a:pPr lvl="0" defTabSz="914400">
-              <a:lnSpc>
-                <a:spcPct val="100000"/>
-              </a:lnSpc>
-              <a:spcBef>
-                <a:spcPts val="600"/>
-              </a:spcBef>
-              <a:buSzPct val="100000"/>
-              <a:buChar char="-"/>
-              <a:defRPr sz="1800"/>
-            </a:pPr>
-            <a:r>
-              <a:rPr sz="1900">
-                <a:latin typeface="Calibri"/>
-                <a:ea typeface="Calibri"/>
-                <a:cs typeface="Calibri"/>
-                <a:sym typeface="Calibri"/>
-              </a:rPr>
-              <a:t> Click </a:t>
-            </a:r>
-            <a:r>
-              <a:rPr sz="1900">
-                <a:solidFill>
-                  <a:srgbClr val="9BBB59"/>
-                </a:solidFill>
-                <a:latin typeface="Calibri"/>
-                <a:ea typeface="Calibri"/>
-                <a:cs typeface="Calibri"/>
-                <a:sym typeface="Calibri"/>
-              </a:rPr>
-              <a:t>java.lang</a:t>
-            </a:r>
-            <a:r>
-              <a:rPr sz="1900">
-                <a:latin typeface="Calibri"/>
-                <a:ea typeface="Calibri"/>
-                <a:cs typeface="Calibri"/>
-                <a:sym typeface="Calibri"/>
-              </a:rPr>
-              <a:t> in the top-left pane</a:t>
-            </a:r>
-            <a:endParaRPr sz="1200">
-              <a:latin typeface="Calibri"/>
-              <a:ea typeface="Calibri"/>
-              <a:cs typeface="Calibri"/>
-              <a:sym typeface="Calibri"/>
-            </a:endParaRPr>
-          </a:p>
-          <a:p>
-            <a:pPr lvl="0" defTabSz="914400">
-              <a:lnSpc>
-                <a:spcPct val="100000"/>
-              </a:lnSpc>
-              <a:spcBef>
-                <a:spcPts val="600"/>
-              </a:spcBef>
-              <a:buSzPct val="100000"/>
-              <a:buChar char="-"/>
-              <a:defRPr sz="1800"/>
-            </a:pPr>
-            <a:r>
-              <a:rPr sz="1900">
-                <a:latin typeface="Calibri"/>
-                <a:ea typeface="Calibri"/>
-                <a:cs typeface="Calibri"/>
-                <a:sym typeface="Calibri"/>
-              </a:rPr>
-              <a:t> Then click </a:t>
-            </a:r>
-            <a:r>
-              <a:rPr sz="1900">
-                <a:solidFill>
-                  <a:srgbClr val="9BBB59"/>
-                </a:solidFill>
-                <a:latin typeface="Calibri"/>
-                <a:ea typeface="Calibri"/>
-                <a:cs typeface="Calibri"/>
-                <a:sym typeface="Calibri"/>
-              </a:rPr>
-              <a:t>String</a:t>
-            </a:r>
-            <a:r>
-              <a:rPr sz="1900">
-                <a:latin typeface="Calibri"/>
-                <a:ea typeface="Calibri"/>
-                <a:cs typeface="Calibri"/>
-                <a:sym typeface="Calibri"/>
-              </a:rPr>
-              <a:t> in the bottom-left pane</a:t>
-            </a:r>
-            <a:endParaRPr sz="1200">
-              <a:latin typeface="Calibri"/>
-              <a:ea typeface="Calibri"/>
-              <a:cs typeface="Calibri"/>
-              <a:sym typeface="Calibri"/>
-            </a:endParaRPr>
-          </a:p>
-          <a:p>
-            <a:pPr lvl="0" defTabSz="914400">
-              <a:lnSpc>
-                <a:spcPct val="100000"/>
-              </a:lnSpc>
-              <a:spcBef>
-                <a:spcPts val="400"/>
-              </a:spcBef>
-              <a:defRPr sz="1800"/>
-            </a:pPr>
-            <a:endParaRPr sz="1200">
-              <a:latin typeface="Calibri"/>
-              <a:ea typeface="Calibri"/>
-              <a:cs typeface="Calibri"/>
-              <a:sym typeface="Calibri"/>
-            </a:endParaRPr>
-          </a:p>
-          <a:p>
-            <a:pPr lvl="0" defTabSz="914400">
-              <a:lnSpc>
-                <a:spcPct val="100000"/>
-              </a:lnSpc>
-              <a:spcBef>
-                <a:spcPts val="400"/>
-              </a:spcBef>
-              <a:defRPr sz="1800"/>
-            </a:pPr>
-            <a:r>
-              <a:rPr sz="1200">
-                <a:latin typeface="Calibri"/>
-                <a:ea typeface="Calibri"/>
-                <a:cs typeface="Calibri"/>
-                <a:sym typeface="Calibri"/>
-              </a:rPr>
-              <a:t>Describe the parts of the String API documentation:</a:t>
-            </a:r>
-          </a:p>
-          <a:p>
-            <a:pPr lvl="0" defTabSz="914400">
-              <a:lnSpc>
-                <a:spcPct val="100000"/>
-              </a:lnSpc>
-              <a:spcBef>
-                <a:spcPts val="400"/>
-              </a:spcBef>
-              <a:defRPr sz="1800"/>
-            </a:pPr>
-            <a:r>
-              <a:rPr sz="1200">
-                <a:latin typeface="Calibri"/>
-                <a:ea typeface="Calibri"/>
-                <a:cs typeface="Calibri"/>
-                <a:sym typeface="Calibri"/>
-              </a:rPr>
-              <a:t>- description of the class</a:t>
-            </a:r>
-          </a:p>
-          <a:p>
-            <a:pPr lvl="0" defTabSz="914400">
-              <a:lnSpc>
-                <a:spcPct val="100000"/>
-              </a:lnSpc>
-              <a:spcBef>
-                <a:spcPts val="400"/>
-              </a:spcBef>
-              <a:defRPr sz="1800"/>
-            </a:pPr>
-            <a:r>
-              <a:rPr sz="1200">
-                <a:latin typeface="Calibri"/>
-                <a:ea typeface="Calibri"/>
-                <a:cs typeface="Calibri"/>
-                <a:sym typeface="Calibri"/>
-              </a:rPr>
-              <a:t>- summaries of all the fields, constructors, and method</a:t>
-            </a:r>
-          </a:p>
-          <a:p>
-            <a:pPr marL="162130" lvl="0" indent="-162130" defTabSz="914400">
-              <a:lnSpc>
-                <a:spcPct val="100000"/>
-              </a:lnSpc>
-              <a:spcBef>
-                <a:spcPts val="400"/>
-              </a:spcBef>
-              <a:buSzPct val="100000"/>
-              <a:buChar char="-"/>
-              <a:defRPr sz="1800"/>
-            </a:pPr>
-            <a:r>
-              <a:rPr sz="1200">
-                <a:latin typeface="Calibri"/>
-                <a:ea typeface="Calibri"/>
-                <a:cs typeface="Calibri"/>
-                <a:sym typeface="Calibri"/>
-              </a:rPr>
-              <a:t>detailed descriptions of everything</a:t>
-            </a:r>
+            <a:pPr>
+              <a:defRPr/>
+            </a:pPr>
+            <a:fld id="{41BB943A-C3B9-42AE-8B54-C2335812312E}" type="slidenum">
+              <a:rPr lang="en-US" smtClean="0"/>
+              <a:pPr>
+                <a:defRPr/>
+              </a:pPr>
+              <a:t>3</a:t>
+            </a:fld>
+            <a:endParaRPr lang="en-US"/>
           </a:p>
         </p:txBody>
       </p:sp>
     </p:spTree>
     <p:extLst>
       <p:ext uri="{BB962C8B-B14F-4D97-AF65-F5344CB8AC3E}">
-        <p14:creationId xmlns:p14="http://schemas.microsoft.com/office/powerpoint/2010/main" val="1218477835"/>
+        <p14:creationId xmlns:p14="http://schemas.microsoft.com/office/powerpoint/2010/main" val="510251943"/>
       </p:ext>
     </p:extLst>
   </p:cSld>
@@ -1434,7 +1223,7 @@
       </p:grpSpPr>
       <p:sp>
         <p:nvSpPr>
-          <p:cNvPr id="84" name="Shape 84"/>
+          <p:cNvPr id="2" name="Slide Image Placeholder 1"/>
           <p:cNvSpPr>
             <a:spLocks noGrp="1" noRot="1" noChangeAspect="1"/>
           </p:cNvSpPr>
@@ -1442,104 +1231,60 @@
             <p:ph type="sldImg"/>
           </p:nvPr>
         </p:nvSpPr>
-        <p:spPr>
-          <a:prstGeom prst="rect">
-            <a:avLst/>
-          </a:prstGeom>
-        </p:spPr>
+        <p:spPr/>
+      </p:sp>
+      <p:sp>
+        <p:nvSpPr>
+          <p:cNvPr id="3" name="Notes Placeholder 2"/>
+          <p:cNvSpPr>
+            <a:spLocks noGrp="1"/>
+          </p:cNvSpPr>
+          <p:nvPr>
+            <p:ph type="body" idx="1"/>
+          </p:nvPr>
+        </p:nvSpPr>
+        <p:spPr/>
         <p:txBody>
           <a:bodyPr/>
           <a:lstStyle/>
           <a:p>
-            <a:pPr lvl="0"/>
-            <a:endParaRPr/>
-          </a:p>
-        </p:txBody>
-      </p:sp>
-      <p:sp>
-        <p:nvSpPr>
-          <p:cNvPr id="85" name="Shape 85"/>
-          <p:cNvSpPr>
-            <a:spLocks noGrp="1"/>
-          </p:cNvSpPr>
-          <p:nvPr>
-            <p:ph type="body" sz="quarter" idx="1"/>
-          </p:nvPr>
-        </p:nvSpPr>
-        <p:spPr>
-          <a:prstGeom prst="rect">
-            <a:avLst/>
-          </a:prstGeom>
-        </p:spPr>
+            <a:endParaRPr lang="en-US" dirty="0"/>
+          </a:p>
+        </p:txBody>
+      </p:sp>
+      <p:sp>
+        <p:nvSpPr>
+          <p:cNvPr id="4" name="Slide Number Placeholder 3"/>
+          <p:cNvSpPr>
+            <a:spLocks noGrp="1"/>
+          </p:cNvSpPr>
+          <p:nvPr>
+            <p:ph type="sldNum" sz="quarter" idx="5"/>
+          </p:nvPr>
+        </p:nvSpPr>
+        <p:spPr/>
         <p:txBody>
           <a:bodyPr/>
           <a:lstStyle/>
           <a:p>
-            <a:pPr lvl="0" defTabSz="914400">
-              <a:lnSpc>
-                <a:spcPct val="100000"/>
-              </a:lnSpc>
-              <a:spcBef>
-                <a:spcPts val="400"/>
-              </a:spcBef>
-              <a:defRPr sz="1800"/>
-            </a:pPr>
-            <a:r>
-              <a:rPr sz="1200">
-                <a:latin typeface="Calibri"/>
-                <a:ea typeface="Calibri"/>
-                <a:cs typeface="Calibri"/>
-                <a:sym typeface="Calibri"/>
-              </a:rPr>
-              <a:t>Point students to the link in the homework if everyone does not have the docs setup.</a:t>
-            </a:r>
-          </a:p>
-          <a:p>
-            <a:pPr lvl="0" defTabSz="914400">
-              <a:lnSpc>
-                <a:spcPct val="100000"/>
-              </a:lnSpc>
-              <a:spcBef>
-                <a:spcPts val="400"/>
-              </a:spcBef>
-              <a:defRPr sz="1800"/>
-            </a:pPr>
-            <a:r>
-              <a:rPr sz="1200">
-                <a:latin typeface="Calibri"/>
-                <a:ea typeface="Calibri"/>
-                <a:cs typeface="Calibri"/>
-                <a:sym typeface="Calibri"/>
-              </a:rPr>
-              <a:t>Demo hover text, F2 to focus on hover text, icon to open in web browser.</a:t>
-            </a:r>
-          </a:p>
-          <a:p>
-            <a:pPr lvl="0" defTabSz="914400">
-              <a:lnSpc>
-                <a:spcPct val="100000"/>
-              </a:lnSpc>
-              <a:spcBef>
-                <a:spcPts val="400"/>
-              </a:spcBef>
-              <a:defRPr sz="1800"/>
-            </a:pPr>
-            <a:r>
-              <a:rPr sz="1200">
-                <a:latin typeface="Calibri"/>
-                <a:ea typeface="Calibri"/>
-                <a:cs typeface="Calibri"/>
-                <a:sym typeface="Calibri"/>
-              </a:rPr>
-              <a:t>Shift-F2 to open external browser immediately.</a:t>
-            </a:r>
+            <a:pPr>
+              <a:defRPr/>
+            </a:pPr>
+            <a:fld id="{41BB943A-C3B9-42AE-8B54-C2335812312E}" type="slidenum">
+              <a:rPr lang="en-US" smtClean="0"/>
+              <a:pPr>
+                <a:defRPr/>
+              </a:pPr>
+              <a:t>4</a:t>
+            </a:fld>
+            <a:endParaRPr lang="en-US"/>
           </a:p>
         </p:txBody>
       </p:sp>
     </p:spTree>
     <p:extLst>
       <p:ext uri="{BB962C8B-B14F-4D97-AF65-F5344CB8AC3E}">
-        <p14:creationId xmlns:p14="http://schemas.microsoft.com/office/powerpoint/2010/main" val="2352995128"/>
+        <p14:creationId xmlns:p14="http://schemas.microsoft.com/office/powerpoint/2010/main" val="1118550212"/>
       </p:ext>
     </p:extLst>
   </p:cSld>
@@ -1550,6 +1295,123 @@
 </file>
 
 <file path=ppt/notesSlides/notesSlide5.xml><?xml version="1.0" encoding="utf-8"?>
+<p:notes xmlns:a="http://schemas.openxmlformats.org/drawingml/2006/main" xmlns:r="http://schemas.openxmlformats.org/officeDocument/2006/relationships" xmlns:p="http://schemas.openxmlformats.org/presentationml/2006/main">
+  <p:cSld>
+    <p:spTree>
+      <p:nvGrpSpPr>
+        <p:cNvPr id="1" name="">
+          <a:extLst>
+            <a:ext uri="{FF2B5EF4-FFF2-40B4-BE49-F238E27FC236}">
+              <a16:creationId xmlns:a16="http://schemas.microsoft.com/office/drawing/2014/main" id="{7CA25803-1595-C759-FC15-E1EC806AE130}"/>
+            </a:ext>
+          </a:extLst>
+        </p:cNvPr>
+        <p:cNvGrpSpPr/>
+        <p:nvPr/>
+      </p:nvGrpSpPr>
+      <p:grpSpPr>
+        <a:xfrm>
+          <a:off x="0" y="0"/>
+          <a:ext cx="0" cy="0"/>
+          <a:chOff x="0" y="0"/>
+          <a:chExt cx="0" cy="0"/>
+        </a:xfrm>
+      </p:grpSpPr>
+      <p:sp>
+        <p:nvSpPr>
+          <p:cNvPr id="2" name="Slide Image Placeholder 1">
+            <a:extLst>
+              <a:ext uri="{FF2B5EF4-FFF2-40B4-BE49-F238E27FC236}">
+                <a16:creationId xmlns:a16="http://schemas.microsoft.com/office/drawing/2014/main" id="{4ADE741C-59A0-57B7-F981-209548CC15E0}"/>
+              </a:ext>
+            </a:extLst>
+          </p:cNvPr>
+          <p:cNvSpPr>
+            <a:spLocks noGrp="1" noRot="1" noChangeAspect="1"/>
+          </p:cNvSpPr>
+          <p:nvPr>
+            <p:ph type="sldImg"/>
+          </p:nvPr>
+        </p:nvSpPr>
+        <p:spPr/>
+      </p:sp>
+      <p:sp>
+        <p:nvSpPr>
+          <p:cNvPr id="3" name="Notes Placeholder 2">
+            <a:extLst>
+              <a:ext uri="{FF2B5EF4-FFF2-40B4-BE49-F238E27FC236}">
+                <a16:creationId xmlns:a16="http://schemas.microsoft.com/office/drawing/2014/main" id="{CC5A8749-32B3-0511-3223-33F54DD42AFD}"/>
+              </a:ext>
+            </a:extLst>
+          </p:cNvPr>
+          <p:cNvSpPr>
+            <a:spLocks noGrp="1"/>
+          </p:cNvSpPr>
+          <p:nvPr>
+            <p:ph type="body" idx="1"/>
+          </p:nvPr>
+        </p:nvSpPr>
+        <p:spPr/>
+        <p:txBody>
+          <a:bodyPr/>
+          <a:lstStyle/>
+          <a:p>
+            <a:r>
+              <a:rPr lang="en-US" dirty="0"/>
+              <a:t>https://www.etymonline.com/word/concatenation</a:t>
+            </a:r>
+          </a:p>
+        </p:txBody>
+      </p:sp>
+      <p:sp>
+        <p:nvSpPr>
+          <p:cNvPr id="4" name="Slide Number Placeholder 3">
+            <a:extLst>
+              <a:ext uri="{FF2B5EF4-FFF2-40B4-BE49-F238E27FC236}">
+                <a16:creationId xmlns:a16="http://schemas.microsoft.com/office/drawing/2014/main" id="{7D695A94-63AE-06BA-1B75-4AB5126D1E05}"/>
+              </a:ext>
+            </a:extLst>
+          </p:cNvPr>
+          <p:cNvSpPr>
+            <a:spLocks noGrp="1"/>
+          </p:cNvSpPr>
+          <p:nvPr>
+            <p:ph type="sldNum" sz="quarter" idx="5"/>
+          </p:nvPr>
+        </p:nvSpPr>
+        <p:spPr/>
+        <p:txBody>
+          <a:bodyPr/>
+          <a:lstStyle/>
+          <a:p>
+            <a:pPr>
+              <a:defRPr/>
+            </a:pPr>
+            <a:fld id="{41BB943A-C3B9-42AE-8B54-C2335812312E}" type="slidenum">
+              <a:rPr lang="en-US" smtClean="0"/>
+              <a:pPr>
+                <a:defRPr/>
+              </a:pPr>
+              <a:t>5</a:t>
+            </a:fld>
+            <a:endParaRPr lang="en-US"/>
+          </a:p>
+        </p:txBody>
+      </p:sp>
+    </p:spTree>
+    <p:extLst>
+      <p:ext uri="{BB962C8B-B14F-4D97-AF65-F5344CB8AC3E}">
+        <p14:creationId xmlns:p14="http://schemas.microsoft.com/office/powerpoint/2010/main" val="3632559307"/>
+      </p:ext>
+    </p:extLst>
+  </p:cSld>
+  <p:clrMapOvr>
+    <a:masterClrMapping/>
+  </p:clrMapOvr>
+</p:notes>
+</file>
+
+<file path=ppt/notesSlides/notesSlide6.xml><?xml version="1.0" encoding="utf-8"?>
 <p:notes xmlns:a="http://schemas.openxmlformats.org/drawingml/2006/main" xmlns:r="http://schemas.openxmlformats.org/officeDocument/2006/relationships" xmlns:p="http://schemas.openxmlformats.org/presentationml/2006/main">
   <p:cSld>
     <p:spTree>
@@ -1568,6 +1430,455 @@
       </p:grpSpPr>
       <p:sp>
         <p:nvSpPr>
+          <p:cNvPr id="77" name="Shape 77"/>
+          <p:cNvSpPr>
+            <a:spLocks noGrp="1" noRot="1" noChangeAspect="1"/>
+          </p:cNvSpPr>
+          <p:nvPr>
+            <p:ph type="sldImg"/>
+          </p:nvPr>
+        </p:nvSpPr>
+        <p:spPr>
+          <a:prstGeom prst="rect">
+            <a:avLst/>
+          </a:prstGeom>
+        </p:spPr>
+        <p:txBody>
+          <a:bodyPr/>
+          <a:lstStyle/>
+          <a:p>
+            <a:pPr lvl="0"/>
+            <a:endParaRPr/>
+          </a:p>
+        </p:txBody>
+      </p:sp>
+      <p:sp>
+        <p:nvSpPr>
+          <p:cNvPr id="78" name="Shape 78"/>
+          <p:cNvSpPr>
+            <a:spLocks noGrp="1"/>
+          </p:cNvSpPr>
+          <p:nvPr>
+            <p:ph type="body" sz="quarter" idx="1"/>
+          </p:nvPr>
+        </p:nvSpPr>
+        <p:spPr>
+          <a:prstGeom prst="rect">
+            <a:avLst/>
+          </a:prstGeom>
+        </p:spPr>
+        <p:txBody>
+          <a:bodyPr/>
+          <a:lstStyle/>
+          <a:p>
+            <a:pPr lvl="0" defTabSz="914400">
+              <a:lnSpc>
+                <a:spcPct val="100000"/>
+              </a:lnSpc>
+              <a:spcBef>
+                <a:spcPts val="800"/>
+              </a:spcBef>
+              <a:defRPr sz="1800"/>
+            </a:pPr>
+            <a:r>
+              <a:rPr sz="2300">
+                <a:latin typeface="Calibri"/>
+                <a:ea typeface="Calibri"/>
+                <a:cs typeface="Calibri"/>
+                <a:sym typeface="Calibri"/>
+              </a:rPr>
+              <a:t>Find the documentation for the </a:t>
+            </a:r>
+            <a:r>
+              <a:rPr sz="2300" b="1">
+                <a:latin typeface="Calibri"/>
+                <a:ea typeface="Calibri"/>
+                <a:cs typeface="Calibri"/>
+                <a:sym typeface="Calibri"/>
+              </a:rPr>
+              <a:t>String</a:t>
+            </a:r>
+            <a:r>
+              <a:rPr sz="2300">
+                <a:latin typeface="Calibri"/>
+                <a:ea typeface="Calibri"/>
+                <a:cs typeface="Calibri"/>
+                <a:sym typeface="Calibri"/>
+              </a:rPr>
+              <a:t> class from one of the above links, as follows:</a:t>
+            </a:r>
+            <a:endParaRPr sz="1200">
+              <a:latin typeface="Calibri"/>
+              <a:ea typeface="Calibri"/>
+              <a:cs typeface="Calibri"/>
+              <a:sym typeface="Calibri"/>
+            </a:endParaRPr>
+          </a:p>
+          <a:p>
+            <a:pPr lvl="0" defTabSz="914400">
+              <a:lnSpc>
+                <a:spcPct val="100000"/>
+              </a:lnSpc>
+              <a:spcBef>
+                <a:spcPts val="600"/>
+              </a:spcBef>
+              <a:buSzPct val="100000"/>
+              <a:buChar char="-"/>
+              <a:defRPr sz="1800"/>
+            </a:pPr>
+            <a:r>
+              <a:rPr sz="1900">
+                <a:latin typeface="Calibri"/>
+                <a:ea typeface="Calibri"/>
+                <a:cs typeface="Calibri"/>
+                <a:sym typeface="Calibri"/>
+              </a:rPr>
+              <a:t> Click </a:t>
+            </a:r>
+            <a:r>
+              <a:rPr sz="1900">
+                <a:solidFill>
+                  <a:srgbClr val="9BBB59"/>
+                </a:solidFill>
+                <a:latin typeface="Calibri"/>
+                <a:ea typeface="Calibri"/>
+                <a:cs typeface="Calibri"/>
+                <a:sym typeface="Calibri"/>
+              </a:rPr>
+              <a:t>java.lang</a:t>
+            </a:r>
+            <a:r>
+              <a:rPr sz="1900">
+                <a:latin typeface="Calibri"/>
+                <a:ea typeface="Calibri"/>
+                <a:cs typeface="Calibri"/>
+                <a:sym typeface="Calibri"/>
+              </a:rPr>
+              <a:t> in the top-left pane</a:t>
+            </a:r>
+            <a:endParaRPr sz="1200">
+              <a:latin typeface="Calibri"/>
+              <a:ea typeface="Calibri"/>
+              <a:cs typeface="Calibri"/>
+              <a:sym typeface="Calibri"/>
+            </a:endParaRPr>
+          </a:p>
+          <a:p>
+            <a:pPr lvl="0" defTabSz="914400">
+              <a:lnSpc>
+                <a:spcPct val="100000"/>
+              </a:lnSpc>
+              <a:spcBef>
+                <a:spcPts val="600"/>
+              </a:spcBef>
+              <a:buSzPct val="100000"/>
+              <a:buChar char="-"/>
+              <a:defRPr sz="1800"/>
+            </a:pPr>
+            <a:r>
+              <a:rPr sz="1900">
+                <a:latin typeface="Calibri"/>
+                <a:ea typeface="Calibri"/>
+                <a:cs typeface="Calibri"/>
+                <a:sym typeface="Calibri"/>
+              </a:rPr>
+              <a:t> Then click </a:t>
+            </a:r>
+            <a:r>
+              <a:rPr sz="1900">
+                <a:solidFill>
+                  <a:srgbClr val="9BBB59"/>
+                </a:solidFill>
+                <a:latin typeface="Calibri"/>
+                <a:ea typeface="Calibri"/>
+                <a:cs typeface="Calibri"/>
+                <a:sym typeface="Calibri"/>
+              </a:rPr>
+              <a:t>String</a:t>
+            </a:r>
+            <a:r>
+              <a:rPr sz="1900">
+                <a:latin typeface="Calibri"/>
+                <a:ea typeface="Calibri"/>
+                <a:cs typeface="Calibri"/>
+                <a:sym typeface="Calibri"/>
+              </a:rPr>
+              <a:t> in the bottom-left pane</a:t>
+            </a:r>
+            <a:endParaRPr sz="1200">
+              <a:latin typeface="Calibri"/>
+              <a:ea typeface="Calibri"/>
+              <a:cs typeface="Calibri"/>
+              <a:sym typeface="Calibri"/>
+            </a:endParaRPr>
+          </a:p>
+          <a:p>
+            <a:pPr lvl="0" defTabSz="914400">
+              <a:lnSpc>
+                <a:spcPct val="100000"/>
+              </a:lnSpc>
+              <a:spcBef>
+                <a:spcPts val="400"/>
+              </a:spcBef>
+              <a:defRPr sz="1800"/>
+            </a:pPr>
+            <a:endParaRPr sz="1200">
+              <a:latin typeface="Calibri"/>
+              <a:ea typeface="Calibri"/>
+              <a:cs typeface="Calibri"/>
+              <a:sym typeface="Calibri"/>
+            </a:endParaRPr>
+          </a:p>
+          <a:p>
+            <a:pPr lvl="0" defTabSz="914400">
+              <a:lnSpc>
+                <a:spcPct val="100000"/>
+              </a:lnSpc>
+              <a:spcBef>
+                <a:spcPts val="400"/>
+              </a:spcBef>
+              <a:defRPr sz="1800"/>
+            </a:pPr>
+            <a:r>
+              <a:rPr sz="1200">
+                <a:latin typeface="Calibri"/>
+                <a:ea typeface="Calibri"/>
+                <a:cs typeface="Calibri"/>
+                <a:sym typeface="Calibri"/>
+              </a:rPr>
+              <a:t>Describe the parts of the String API documentation:</a:t>
+            </a:r>
+          </a:p>
+          <a:p>
+            <a:pPr lvl="0" defTabSz="914400">
+              <a:lnSpc>
+                <a:spcPct val="100000"/>
+              </a:lnSpc>
+              <a:spcBef>
+                <a:spcPts val="400"/>
+              </a:spcBef>
+              <a:defRPr sz="1800"/>
+            </a:pPr>
+            <a:r>
+              <a:rPr sz="1200">
+                <a:latin typeface="Calibri"/>
+                <a:ea typeface="Calibri"/>
+                <a:cs typeface="Calibri"/>
+                <a:sym typeface="Calibri"/>
+              </a:rPr>
+              <a:t>- description of the class</a:t>
+            </a:r>
+          </a:p>
+          <a:p>
+            <a:pPr lvl="0" defTabSz="914400">
+              <a:lnSpc>
+                <a:spcPct val="100000"/>
+              </a:lnSpc>
+              <a:spcBef>
+                <a:spcPts val="400"/>
+              </a:spcBef>
+              <a:defRPr sz="1800"/>
+            </a:pPr>
+            <a:r>
+              <a:rPr sz="1200">
+                <a:latin typeface="Calibri"/>
+                <a:ea typeface="Calibri"/>
+                <a:cs typeface="Calibri"/>
+                <a:sym typeface="Calibri"/>
+              </a:rPr>
+              <a:t>- summaries of all the fields, constructors, and method</a:t>
+            </a:r>
+          </a:p>
+          <a:p>
+            <a:pPr marL="162130" lvl="0" indent="-162130" defTabSz="914400">
+              <a:lnSpc>
+                <a:spcPct val="100000"/>
+              </a:lnSpc>
+              <a:spcBef>
+                <a:spcPts val="400"/>
+              </a:spcBef>
+              <a:buSzPct val="100000"/>
+              <a:buChar char="-"/>
+              <a:defRPr sz="1800"/>
+            </a:pPr>
+            <a:r>
+              <a:rPr sz="1200">
+                <a:latin typeface="Calibri"/>
+                <a:ea typeface="Calibri"/>
+                <a:cs typeface="Calibri"/>
+                <a:sym typeface="Calibri"/>
+              </a:rPr>
+              <a:t>detailed descriptions of everything</a:t>
+            </a:r>
+          </a:p>
+        </p:txBody>
+      </p:sp>
+    </p:spTree>
+    <p:extLst>
+      <p:ext uri="{BB962C8B-B14F-4D97-AF65-F5344CB8AC3E}">
+        <p14:creationId xmlns:p14="http://schemas.microsoft.com/office/powerpoint/2010/main" val="1218477835"/>
+      </p:ext>
+    </p:extLst>
+  </p:cSld>
+  <p:clrMapOvr>
+    <a:masterClrMapping/>
+  </p:clrMapOvr>
+</p:notes>
+</file>
+
+<file path=ppt/notesSlides/notesSlide7.xml><?xml version="1.0" encoding="utf-8"?>
+<p:notes xmlns:a="http://schemas.openxmlformats.org/drawingml/2006/main" xmlns:r="http://schemas.openxmlformats.org/officeDocument/2006/relationships" xmlns:p="http://schemas.openxmlformats.org/presentationml/2006/main">
+  <p:cSld>
+    <p:spTree>
+      <p:nvGrpSpPr>
+        <p:cNvPr id="1" name=""/>
+        <p:cNvGrpSpPr/>
+        <p:nvPr/>
+      </p:nvGrpSpPr>
+      <p:grpSpPr>
+        <a:xfrm>
+          <a:off x="0" y="0"/>
+          <a:ext cx="0" cy="0"/>
+          <a:chOff x="0" y="0"/>
+          <a:chExt cx="0" cy="0"/>
+        </a:xfrm>
+      </p:grpSpPr>
+      <p:sp>
+        <p:nvSpPr>
+          <p:cNvPr id="84" name="Shape 84"/>
+          <p:cNvSpPr>
+            <a:spLocks noGrp="1" noRot="1" noChangeAspect="1"/>
+          </p:cNvSpPr>
+          <p:nvPr>
+            <p:ph type="sldImg"/>
+          </p:nvPr>
+        </p:nvSpPr>
+        <p:spPr>
+          <a:prstGeom prst="rect">
+            <a:avLst/>
+          </a:prstGeom>
+        </p:spPr>
+        <p:txBody>
+          <a:bodyPr/>
+          <a:lstStyle/>
+          <a:p>
+            <a:pPr lvl="0"/>
+            <a:endParaRPr/>
+          </a:p>
+        </p:txBody>
+      </p:sp>
+      <p:sp>
+        <p:nvSpPr>
+          <p:cNvPr id="85" name="Shape 85"/>
+          <p:cNvSpPr>
+            <a:spLocks noGrp="1"/>
+          </p:cNvSpPr>
+          <p:nvPr>
+            <p:ph type="body" sz="quarter" idx="1"/>
+          </p:nvPr>
+        </p:nvSpPr>
+        <p:spPr>
+          <a:prstGeom prst="rect">
+            <a:avLst/>
+          </a:prstGeom>
+        </p:spPr>
+        <p:txBody>
+          <a:bodyPr/>
+          <a:lstStyle/>
+          <a:p>
+            <a:pPr lvl="0" defTabSz="914400">
+              <a:lnSpc>
+                <a:spcPct val="100000"/>
+              </a:lnSpc>
+              <a:spcBef>
+                <a:spcPts val="400"/>
+              </a:spcBef>
+              <a:defRPr sz="1800"/>
+            </a:pPr>
+            <a:r>
+              <a:rPr sz="1200">
+                <a:latin typeface="Calibri"/>
+                <a:ea typeface="Calibri"/>
+                <a:cs typeface="Calibri"/>
+                <a:sym typeface="Calibri"/>
+              </a:rPr>
+              <a:t>Point students to the link in the homework if everyone does not have the docs setup.</a:t>
+            </a:r>
+          </a:p>
+          <a:p>
+            <a:pPr lvl="0" defTabSz="914400">
+              <a:lnSpc>
+                <a:spcPct val="100000"/>
+              </a:lnSpc>
+              <a:spcBef>
+                <a:spcPts val="400"/>
+              </a:spcBef>
+              <a:defRPr sz="1800"/>
+            </a:pPr>
+            <a:r>
+              <a:rPr sz="1200">
+                <a:latin typeface="Calibri"/>
+                <a:ea typeface="Calibri"/>
+                <a:cs typeface="Calibri"/>
+                <a:sym typeface="Calibri"/>
+              </a:rPr>
+              <a:t>Demo hover text, F2 to focus on hover text, icon to open in web browser.</a:t>
+            </a:r>
+          </a:p>
+          <a:p>
+            <a:pPr lvl="0" defTabSz="914400">
+              <a:lnSpc>
+                <a:spcPct val="100000"/>
+              </a:lnSpc>
+              <a:spcBef>
+                <a:spcPts val="400"/>
+              </a:spcBef>
+              <a:defRPr sz="1800"/>
+            </a:pPr>
+            <a:r>
+              <a:rPr sz="1200">
+                <a:latin typeface="Calibri"/>
+                <a:ea typeface="Calibri"/>
+                <a:cs typeface="Calibri"/>
+                <a:sym typeface="Calibri"/>
+              </a:rPr>
+              <a:t>Shift-F2 to open external browser immediately.</a:t>
+            </a:r>
+          </a:p>
+        </p:txBody>
+      </p:sp>
+    </p:spTree>
+    <p:extLst>
+      <p:ext uri="{BB962C8B-B14F-4D97-AF65-F5344CB8AC3E}">
+        <p14:creationId xmlns:p14="http://schemas.microsoft.com/office/powerpoint/2010/main" val="2352995128"/>
+      </p:ext>
+    </p:extLst>
+  </p:cSld>
+  <p:clrMapOvr>
+    <a:masterClrMapping/>
+  </p:clrMapOvr>
+</p:notes>
+</file>
+
+<file path=ppt/notesSlides/notesSlide8.xml><?xml version="1.0" encoding="utf-8"?>
+<p:notes xmlns:a="http://schemas.openxmlformats.org/drawingml/2006/main" xmlns:r="http://schemas.openxmlformats.org/officeDocument/2006/relationships" xmlns:p="http://schemas.openxmlformats.org/presentationml/2006/main">
+  <p:cSld>
+    <p:spTree>
+      <p:nvGrpSpPr>
+        <p:cNvPr id="1" name=""/>
+        <p:cNvGrpSpPr/>
+        <p:nvPr/>
+      </p:nvGrpSpPr>
+      <p:grpSpPr>
+        <a:xfrm>
+          <a:off x="0" y="0"/>
+          <a:ext cx="0" cy="0"/>
+          <a:chOff x="0" y="0"/>
+          <a:chExt cx="0" cy="0"/>
+        </a:xfrm>
+      </p:grpSpPr>
+      <p:sp>
+        <p:nvSpPr>
           <p:cNvPr id="2" name="Slide Image Placeholder 1"/>
           <p:cNvSpPr>
             <a:spLocks noGrp="1" noRot="1" noChangeAspect="1"/>
@@ -1618,7 +1929,7 @@
 </p:notes>
 </file>
 
-<file path=ppt/notesSlides/notesSlide6.xml><?xml version="1.0" encoding="utf-8"?>
+<file path=ppt/notesSlides/notesSlide9.xml><?xml version="1.0" encoding="utf-8"?>
 <p:notes xmlns:a="http://schemas.openxmlformats.org/drawingml/2006/main" xmlns:r="http://schemas.openxmlformats.org/officeDocument/2006/relationships" xmlns:p="http://schemas.openxmlformats.org/presentationml/2006/main">
   <p:cSld>
     <p:spTree>
@@ -1894,7 +2205,7 @@
               <a:pPr>
                 <a:defRPr/>
               </a:pPr>
-              <a:t>Wednesday, September 9, 2026</a:t>
+              <a:t>Friday, September 11, 2026</a:t>
             </a:fld>
             <a:endParaRPr lang="en-US"/>
           </a:p>
@@ -2077,7 +2388,7 @@
               <a:pPr>
                 <a:defRPr/>
               </a:pPr>
-              <a:t>Wednesday, September 9, 2026</a:t>
+              <a:t>Friday, September 11, 2026</a:t>
             </a:fld>
             <a:endParaRPr lang="en-US"/>
           </a:p>
@@ -2270,7 +2581,7 @@
               <a:pPr>
                 <a:defRPr/>
               </a:pPr>
-              <a:t>Wednesday, September 9, 2026</a:t>
+              <a:t>Friday, September 11, 2026</a:t>
             </a:fld>
             <a:endParaRPr lang="en-US"/>
           </a:p>
@@ -2453,7 +2764,7 @@
               <a:pPr>
                 <a:defRPr/>
               </a:pPr>
-              <a:t>Wednesday, September 9, 2026</a:t>
+              <a:t>Friday, September 11, 2026</a:t>
             </a:fld>
             <a:endParaRPr lang="en-US"/>
           </a:p>
@@ -2713,7 +3024,7 @@
               <a:pPr>
                 <a:defRPr/>
               </a:pPr>
-              <a:t>Wednesday, September 9, 2026</a:t>
+              <a:t>Friday, September 11, 2026</a:t>
             </a:fld>
             <a:endParaRPr lang="en-US"/>
           </a:p>
@@ -3013,7 +3324,7 @@
               <a:pPr>
                 <a:defRPr/>
               </a:pPr>
-              <a:t>Wednesday, September 9, 2026</a:t>
+              <a:t>Friday, September 11, 2026</a:t>
             </a:fld>
             <a:endParaRPr lang="en-US"/>
           </a:p>
@@ -3447,7 +3758,7 @@
               <a:pPr>
                 <a:defRPr/>
               </a:pPr>
-              <a:t>Wednesday, September 9, 2026</a:t>
+              <a:t>Friday, September 11, 2026</a:t>
             </a:fld>
             <a:endParaRPr lang="en-US"/>
           </a:p>
@@ -3579,7 +3890,7 @@
               <a:pPr>
                 <a:defRPr/>
               </a:pPr>
-              <a:t>Wednesday, September 9, 2026</a:t>
+              <a:t>Friday, September 11, 2026</a:t>
             </a:fld>
             <a:endParaRPr lang="en-US"/>
           </a:p>
@@ -3689,7 +4000,7 @@
               <a:pPr>
                 <a:defRPr/>
               </a:pPr>
-              <a:t>Wednesday, September 9, 2026</a:t>
+              <a:t>Friday, September 11, 2026</a:t>
             </a:fld>
             <a:endParaRPr lang="en-US"/>
           </a:p>
@@ -3979,7 +4290,7 @@
               <a:pPr>
                 <a:defRPr/>
               </a:pPr>
-              <a:t>Wednesday, September 9, 2026</a:t>
+              <a:t>Friday, September 11, 2026</a:t>
             </a:fld>
             <a:endParaRPr lang="en-US"/>
           </a:p>
@@ -4246,7 +4557,7 @@
               <a:pPr>
                 <a:defRPr/>
               </a:pPr>
-              <a:t>Wednesday, September 9, 2026</a:t>
+              <a:t>Friday, September 11, 2026</a:t>
             </a:fld>
             <a:endParaRPr lang="en-US"/>
           </a:p>
@@ -4472,7 +4783,7 @@
               <a:pPr>
                 <a:defRPr/>
               </a:pPr>
-              <a:t>Wednesday, September 9, 2026</a:t>
+              <a:t>Friday, September 11, 2026</a:t>
             </a:fld>
             <a:endParaRPr lang="en-US"/>
           </a:p>
@@ -4931,7 +5242,7 @@
           </a:ln>
           <a:extLst>
             <a:ext uri="{C572A759-6A51-4108-AA02-DFA0A04FC94B}">
-              <ma14:wrappingTextBoxFlag xmlns="" xmlns:ma14="http://schemas.microsoft.com/office/mac/drawingml/2011/main" val="1"/>
+              <ma14:wrappingTextBoxFlag xmlns:ma14="http://schemas.microsoft.com/office/mac/drawingml/2011/main" xmlns="" val="1"/>
             </a:ext>
           </a:extLst>
         </p:spPr>
@@ -5162,7 +5473,13 @@
       </p:grpSpPr>
       <p:sp>
         <p:nvSpPr>
-          <p:cNvPr id="2" name="Title 1"/>
+          <p:cNvPr id="2" name="Title 1">
+            <a:extLst>
+              <a:ext uri="{FF2B5EF4-FFF2-40B4-BE49-F238E27FC236}">
+                <a16:creationId xmlns:a16="http://schemas.microsoft.com/office/drawing/2014/main" id="{D4043EFD-3806-4E21-0709-F14325A0B161}"/>
+              </a:ext>
+            </a:extLst>
+          </p:cNvPr>
           <p:cNvSpPr>
             <a:spLocks noGrp="1"/>
           </p:cNvSpPr>
@@ -5172,171 +5489,56 @@
         </p:nvSpPr>
         <p:spPr/>
         <p:txBody>
-          <a:bodyPr>
-            <a:normAutofit/>
-          </a:bodyPr>
+          <a:bodyPr/>
           <a:lstStyle/>
           <a:p>
             <a:r>
               <a:rPr lang="en-US" dirty="0"/>
-              <a:t>Strings – What, When, Why, How?</a:t>
-            </a:r>
-          </a:p>
-        </p:txBody>
-      </p:sp>
-      <p:sp>
-        <p:nvSpPr>
-          <p:cNvPr id="3" name="Content Placeholder 2"/>
-          <p:cNvSpPr>
-            <a:spLocks noGrp="1"/>
-          </p:cNvSpPr>
-          <p:nvPr>
-            <p:ph idx="1"/>
-          </p:nvPr>
-        </p:nvSpPr>
+              <a:t>Possible etymology(?)</a:t>
+            </a:r>
+          </a:p>
+        </p:txBody>
+      </p:sp>
+      <p:pic>
+        <p:nvPicPr>
+          <p:cNvPr id="5" name="Picture 4">
+            <a:extLst>
+              <a:ext uri="{FF2B5EF4-FFF2-40B4-BE49-F238E27FC236}">
+                <a16:creationId xmlns:a16="http://schemas.microsoft.com/office/drawing/2014/main" id="{13752CD4-0BFD-FEE5-193C-5BCFF1120FAE}"/>
+              </a:ext>
+            </a:extLst>
+          </p:cNvPr>
+          <p:cNvPicPr>
+            <a:picLocks noChangeAspect="1"/>
+          </p:cNvPicPr>
+          <p:nvPr/>
+        </p:nvPicPr>
+        <p:blipFill>
+          <a:blip r:embed="rId3">
+            <a:extLst>
+              <a:ext uri="{28A0092B-C50C-407E-A947-70E740481C1C}">
+                <a14:useLocalDpi xmlns:a14="http://schemas.microsoft.com/office/drawing/2010/main" val="0"/>
+              </a:ext>
+            </a:extLst>
+          </a:blip>
+          <a:stretch>
+            <a:fillRect/>
+          </a:stretch>
+        </p:blipFill>
         <p:spPr>
-          <a:xfrm>
-            <a:off x="457200" y="1600200"/>
-            <a:ext cx="8534400" cy="4876800"/>
+          <a:xfrm rot="16200000">
+            <a:off x="2018071" y="1417638"/>
+            <a:ext cx="5107858" cy="5107858"/>
           </a:xfrm>
+          <a:prstGeom prst="rect">
+            <a:avLst/>
+          </a:prstGeom>
         </p:spPr>
-        <p:txBody>
-          <a:bodyPr>
-            <a:normAutofit/>
-          </a:bodyPr>
-          <a:lstStyle/>
-          <a:p>
-            <a:pPr marL="0" indent="0">
-              <a:buNone/>
-            </a:pPr>
-            <a:r>
-              <a:rPr lang="en-US" dirty="0"/>
-              <a:t>Why:</a:t>
-            </a:r>
-          </a:p>
-          <a:p>
-            <a:r>
-              <a:rPr lang="en-US" dirty="0" err="1"/>
-              <a:t>Sooooo</a:t>
-            </a:r>
-            <a:r>
-              <a:rPr lang="en-US" dirty="0"/>
-              <a:t> much easier than char arrays!</a:t>
-            </a:r>
-          </a:p>
-          <a:p>
-            <a:pPr marL="0" indent="0">
-              <a:buNone/>
-            </a:pPr>
-            <a:r>
-              <a:rPr lang="en-US" dirty="0"/>
-              <a:t>How:</a:t>
-            </a:r>
-          </a:p>
-          <a:p>
-            <a:pPr lvl="0"/>
-            <a:r>
-              <a:rPr lang="en-US" sz="2000" dirty="0"/>
-              <a:t>String </a:t>
-            </a:r>
-            <a:r>
-              <a:rPr lang="en-US" sz="2000" dirty="0" err="1"/>
-              <a:t>myString</a:t>
-            </a:r>
-            <a:r>
-              <a:rPr lang="en-US" sz="2000" dirty="0"/>
-              <a:t> = “hello”;</a:t>
-            </a:r>
-          </a:p>
-          <a:p>
-            <a:pPr lvl="0"/>
-            <a:r>
-              <a:rPr lang="en-US" sz="2000" dirty="0"/>
-              <a:t>String </a:t>
-            </a:r>
-            <a:r>
-              <a:rPr lang="en-US" sz="2000" dirty="0" err="1"/>
-              <a:t>otherString</a:t>
-            </a:r>
-            <a:r>
-              <a:rPr lang="en-US" sz="2000" dirty="0"/>
-              <a:t> = new String(“hello2”);</a:t>
-            </a:r>
-          </a:p>
-          <a:p>
-            <a:pPr lvl="0"/>
-            <a:r>
-              <a:rPr lang="en-US" sz="2000" dirty="0"/>
-              <a:t>String </a:t>
-            </a:r>
-            <a:r>
-              <a:rPr lang="en-US" sz="2000" dirty="0" err="1"/>
-              <a:t>combinedString</a:t>
-            </a:r>
-            <a:r>
-              <a:rPr lang="en-US" sz="2000" dirty="0"/>
-              <a:t> = </a:t>
-            </a:r>
-            <a:r>
-              <a:rPr lang="en-US" sz="2000" dirty="0" err="1"/>
-              <a:t>myString</a:t>
-            </a:r>
-            <a:r>
-              <a:rPr lang="en-US" sz="2000" dirty="0"/>
-              <a:t> + “ “ + </a:t>
-            </a:r>
-            <a:r>
-              <a:rPr lang="en-US" sz="2000" dirty="0" err="1"/>
-              <a:t>otherString</a:t>
-            </a:r>
-            <a:r>
-              <a:rPr lang="en-US" sz="2000" dirty="0"/>
-              <a:t> + “!”;</a:t>
-            </a:r>
-          </a:p>
-          <a:p>
-            <a:pPr marL="0" indent="0">
-              <a:buNone/>
-            </a:pPr>
-            <a:endParaRPr lang="en-US" sz="2400" dirty="0">
-              <a:latin typeface="Courier New" panose="02070309020205020404" pitchFamily="49" charset="0"/>
-              <a:cs typeface="Courier New" panose="02070309020205020404" pitchFamily="49" charset="0"/>
-            </a:endParaRPr>
-          </a:p>
-          <a:p>
-            <a:r>
-              <a:rPr lang="en-US" dirty="0"/>
-              <a:t>Retrieving data</a:t>
-            </a:r>
-          </a:p>
-          <a:p>
-            <a:pPr lvl="1"/>
-            <a:r>
-              <a:rPr lang="en-US" dirty="0"/>
-              <a:t>Need the API</a:t>
-            </a:r>
-          </a:p>
-          <a:p>
-            <a:endParaRPr lang="en-US" dirty="0"/>
-          </a:p>
-          <a:p>
-            <a:pPr marL="0" indent="0">
-              <a:buNone/>
-            </a:pPr>
-            <a:endParaRPr lang="en-US" dirty="0"/>
-          </a:p>
-          <a:p>
-            <a:pPr marL="0" indent="0">
-              <a:buNone/>
-            </a:pPr>
-            <a:endParaRPr lang="en-US" dirty="0"/>
-          </a:p>
-        </p:txBody>
-      </p:sp>
+      </p:pic>
     </p:spTree>
     <p:extLst>
       <p:ext uri="{BB962C8B-B14F-4D97-AF65-F5344CB8AC3E}">
-        <p14:creationId xmlns:p14="http://schemas.microsoft.com/office/powerpoint/2010/main" val="1265363463"/>
+        <p14:creationId xmlns:p14="http://schemas.microsoft.com/office/powerpoint/2010/main" val="2276840222"/>
       </p:ext>
     </p:extLst>
   </p:cSld>
@@ -5365,6 +5567,463 @@
       </p:grpSpPr>
       <p:sp>
         <p:nvSpPr>
+          <p:cNvPr id="2" name="Title 1"/>
+          <p:cNvSpPr>
+            <a:spLocks noGrp="1"/>
+          </p:cNvSpPr>
+          <p:nvPr>
+            <p:ph type="title"/>
+          </p:nvPr>
+        </p:nvSpPr>
+        <p:spPr/>
+        <p:txBody>
+          <a:bodyPr>
+            <a:normAutofit/>
+          </a:bodyPr>
+          <a:lstStyle/>
+          <a:p>
+            <a:r>
+              <a:rPr lang="en-US" dirty="0"/>
+              <a:t>Strings – What, When, Why, How?</a:t>
+            </a:r>
+          </a:p>
+        </p:txBody>
+      </p:sp>
+      <p:sp>
+        <p:nvSpPr>
+          <p:cNvPr id="3" name="Content Placeholder 2"/>
+          <p:cNvSpPr>
+            <a:spLocks noGrp="1"/>
+          </p:cNvSpPr>
+          <p:nvPr>
+            <p:ph idx="1"/>
+          </p:nvPr>
+        </p:nvSpPr>
+        <p:spPr>
+          <a:xfrm>
+            <a:off x="457200" y="1600200"/>
+            <a:ext cx="8534400" cy="4876800"/>
+          </a:xfrm>
+        </p:spPr>
+        <p:txBody>
+          <a:bodyPr>
+            <a:normAutofit/>
+          </a:bodyPr>
+          <a:lstStyle/>
+          <a:p>
+            <a:pPr marL="0" indent="0">
+              <a:buNone/>
+            </a:pPr>
+            <a:r>
+              <a:rPr lang="en-US" dirty="0"/>
+              <a:t>Why:</a:t>
+            </a:r>
+          </a:p>
+          <a:p>
+            <a:r>
+              <a:rPr lang="en-US" dirty="0" err="1"/>
+              <a:t>Sooooo</a:t>
+            </a:r>
+            <a:r>
+              <a:rPr lang="en-US" dirty="0"/>
+              <a:t> much easier than char arrays!</a:t>
+            </a:r>
+          </a:p>
+          <a:p>
+            <a:pPr marL="0" indent="0">
+              <a:buNone/>
+            </a:pPr>
+            <a:r>
+              <a:rPr lang="en-US" dirty="0"/>
+              <a:t>How:</a:t>
+            </a:r>
+          </a:p>
+          <a:p>
+            <a:pPr lvl="0"/>
+            <a:r>
+              <a:rPr lang="en-US" sz="2000" dirty="0"/>
+              <a:t>String </a:t>
+            </a:r>
+            <a:r>
+              <a:rPr lang="en-US" sz="2000" dirty="0" err="1"/>
+              <a:t>myString</a:t>
+            </a:r>
+            <a:r>
+              <a:rPr lang="en-US" sz="2000" dirty="0"/>
+              <a:t> = “hello”;</a:t>
+            </a:r>
+          </a:p>
+          <a:p>
+            <a:pPr lvl="0"/>
+            <a:r>
+              <a:rPr lang="en-US" sz="2000" dirty="0"/>
+              <a:t>String </a:t>
+            </a:r>
+            <a:r>
+              <a:rPr lang="en-US" sz="2000" dirty="0" err="1"/>
+              <a:t>otherString</a:t>
+            </a:r>
+            <a:r>
+              <a:rPr lang="en-US" sz="2000" dirty="0"/>
+              <a:t> = new String(“hello2”);</a:t>
+            </a:r>
+          </a:p>
+          <a:p>
+            <a:pPr lvl="0"/>
+            <a:r>
+              <a:rPr lang="en-US" sz="2000" dirty="0"/>
+              <a:t>String </a:t>
+            </a:r>
+            <a:r>
+              <a:rPr lang="en-US" sz="2000" dirty="0" err="1"/>
+              <a:t>combinedString</a:t>
+            </a:r>
+            <a:r>
+              <a:rPr lang="en-US" sz="2000" dirty="0"/>
+              <a:t> = </a:t>
+            </a:r>
+            <a:r>
+              <a:rPr lang="en-US" sz="2000" dirty="0" err="1"/>
+              <a:t>myString</a:t>
+            </a:r>
+            <a:r>
+              <a:rPr lang="en-US" sz="2000" dirty="0"/>
+              <a:t> + “ “ + </a:t>
+            </a:r>
+            <a:r>
+              <a:rPr lang="en-US" sz="2000" dirty="0" err="1"/>
+              <a:t>otherString</a:t>
+            </a:r>
+            <a:r>
+              <a:rPr lang="en-US" sz="2000" dirty="0"/>
+              <a:t> + “!”;</a:t>
+            </a:r>
+          </a:p>
+          <a:p>
+            <a:pPr marL="0" indent="0">
+              <a:buNone/>
+            </a:pPr>
+            <a:endParaRPr lang="en-US" sz="2400" dirty="0">
+              <a:latin typeface="Courier New" panose="02070309020205020404" pitchFamily="49" charset="0"/>
+              <a:cs typeface="Courier New" panose="02070309020205020404" pitchFamily="49" charset="0"/>
+            </a:endParaRPr>
+          </a:p>
+          <a:p>
+            <a:r>
+              <a:rPr lang="en-US" dirty="0"/>
+              <a:t>Retrieving data</a:t>
+            </a:r>
+          </a:p>
+          <a:p>
+            <a:pPr lvl="1"/>
+            <a:r>
+              <a:rPr lang="en-US" dirty="0"/>
+              <a:t>Need the API</a:t>
+            </a:r>
+          </a:p>
+          <a:p>
+            <a:endParaRPr lang="en-US" dirty="0"/>
+          </a:p>
+          <a:p>
+            <a:pPr marL="0" indent="0">
+              <a:buNone/>
+            </a:pPr>
+            <a:endParaRPr lang="en-US" dirty="0"/>
+          </a:p>
+          <a:p>
+            <a:pPr marL="0" indent="0">
+              <a:buNone/>
+            </a:pPr>
+            <a:endParaRPr lang="en-US" dirty="0"/>
+          </a:p>
+        </p:txBody>
+      </p:sp>
+    </p:spTree>
+    <p:extLst>
+      <p:ext uri="{BB962C8B-B14F-4D97-AF65-F5344CB8AC3E}">
+        <p14:creationId xmlns:p14="http://schemas.microsoft.com/office/powerpoint/2010/main" val="1265363463"/>
+      </p:ext>
+    </p:extLst>
+  </p:cSld>
+  <p:clrMapOvr>
+    <a:masterClrMapping/>
+  </p:clrMapOvr>
+</p:sld>
+</file>
+
+<file path=ppt/slides/slide5.xml><?xml version="1.0" encoding="utf-8"?>
+<p:sld xmlns:a="http://schemas.openxmlformats.org/drawingml/2006/main" xmlns:r="http://schemas.openxmlformats.org/officeDocument/2006/relationships" xmlns:p="http://schemas.openxmlformats.org/presentationml/2006/main">
+  <p:cSld>
+    <p:spTree>
+      <p:nvGrpSpPr>
+        <p:cNvPr id="1" name="">
+          <a:extLst>
+            <a:ext uri="{FF2B5EF4-FFF2-40B4-BE49-F238E27FC236}">
+              <a16:creationId xmlns:a16="http://schemas.microsoft.com/office/drawing/2014/main" id="{2EBC6B85-6F9E-1A4E-8982-C4B90ED22E7B}"/>
+            </a:ext>
+          </a:extLst>
+        </p:cNvPr>
+        <p:cNvGrpSpPr/>
+        <p:nvPr/>
+      </p:nvGrpSpPr>
+      <p:grpSpPr>
+        <a:xfrm>
+          <a:off x="0" y="0"/>
+          <a:ext cx="0" cy="0"/>
+          <a:chOff x="0" y="0"/>
+          <a:chExt cx="0" cy="0"/>
+        </a:xfrm>
+      </p:grpSpPr>
+      <p:sp>
+        <p:nvSpPr>
+          <p:cNvPr id="2" name="Title 1">
+            <a:extLst>
+              <a:ext uri="{FF2B5EF4-FFF2-40B4-BE49-F238E27FC236}">
+                <a16:creationId xmlns:a16="http://schemas.microsoft.com/office/drawing/2014/main" id="{7F52C7FD-BB4D-836A-0A5F-4A47D6D461BF}"/>
+              </a:ext>
+            </a:extLst>
+          </p:cNvPr>
+          <p:cNvSpPr>
+            <a:spLocks noGrp="1"/>
+          </p:cNvSpPr>
+          <p:nvPr>
+            <p:ph type="title"/>
+          </p:nvPr>
+        </p:nvSpPr>
+        <p:spPr/>
+        <p:txBody>
+          <a:bodyPr>
+            <a:normAutofit/>
+          </a:bodyPr>
+          <a:lstStyle/>
+          <a:p>
+            <a:r>
+              <a:rPr lang="en-US" dirty="0"/>
+              <a:t>Strings – Concatenation</a:t>
+            </a:r>
+          </a:p>
+        </p:txBody>
+      </p:sp>
+      <p:pic>
+        <p:nvPicPr>
+          <p:cNvPr id="7" name="Picture 6">
+            <a:extLst>
+              <a:ext uri="{FF2B5EF4-FFF2-40B4-BE49-F238E27FC236}">
+                <a16:creationId xmlns:a16="http://schemas.microsoft.com/office/drawing/2014/main" id="{81781BE3-82FF-F3E7-F410-2B0B0B53218E}"/>
+              </a:ext>
+            </a:extLst>
+          </p:cNvPr>
+          <p:cNvPicPr>
+            <a:picLocks noChangeAspect="1"/>
+          </p:cNvPicPr>
+          <p:nvPr/>
+        </p:nvPicPr>
+        <p:blipFill>
+          <a:blip r:embed="rId3"/>
+          <a:stretch>
+            <a:fillRect/>
+          </a:stretch>
+        </p:blipFill>
+        <p:spPr>
+          <a:xfrm>
+            <a:off x="601439" y="3429000"/>
+            <a:ext cx="7519997" cy="2891476"/>
+          </a:xfrm>
+          <a:prstGeom prst="rect">
+            <a:avLst/>
+          </a:prstGeom>
+        </p:spPr>
+      </p:pic>
+      <p:sp>
+        <p:nvSpPr>
+          <p:cNvPr id="8" name="TextBox 7">
+            <a:extLst>
+              <a:ext uri="{FF2B5EF4-FFF2-40B4-BE49-F238E27FC236}">
+                <a16:creationId xmlns:a16="http://schemas.microsoft.com/office/drawing/2014/main" id="{A0399491-E975-697C-451F-DFD228EC0F5F}"/>
+              </a:ext>
+            </a:extLst>
+          </p:cNvPr>
+          <p:cNvSpPr txBox="1"/>
+          <p:nvPr/>
+        </p:nvSpPr>
+        <p:spPr>
+          <a:xfrm>
+            <a:off x="786581" y="1417638"/>
+            <a:ext cx="7149714" cy="1754326"/>
+          </a:xfrm>
+          <a:prstGeom prst="rect">
+            <a:avLst/>
+          </a:prstGeom>
+          <a:noFill/>
+        </p:spPr>
+        <p:txBody>
+          <a:bodyPr wrap="none" rtlCol="0">
+            <a:spAutoFit/>
+          </a:bodyPr>
+          <a:lstStyle/>
+          <a:p>
+            <a:r>
+              <a:rPr lang="en-US" dirty="0">
+                <a:latin typeface="Consolas" panose="020B0609020204030204" pitchFamily="49" charset="0"/>
+              </a:rPr>
+              <a:t>String </a:t>
+            </a:r>
+            <a:r>
+              <a:rPr lang="en-US" dirty="0" err="1">
+                <a:latin typeface="Consolas" panose="020B0609020204030204" pitchFamily="49" charset="0"/>
+              </a:rPr>
+              <a:t>firstString</a:t>
+            </a:r>
+            <a:r>
+              <a:rPr lang="en-US" dirty="0">
+                <a:latin typeface="Consolas" panose="020B0609020204030204" pitchFamily="49" charset="0"/>
+              </a:rPr>
+              <a:t> = “Hello”;</a:t>
+            </a:r>
+          </a:p>
+          <a:p>
+            <a:r>
+              <a:rPr lang="en-US" dirty="0">
+                <a:latin typeface="Consolas" panose="020B0609020204030204" pitchFamily="49" charset="0"/>
+              </a:rPr>
+              <a:t>String </a:t>
+            </a:r>
+            <a:r>
+              <a:rPr lang="en-US" dirty="0" err="1">
+                <a:latin typeface="Consolas" panose="020B0609020204030204" pitchFamily="49" charset="0"/>
+              </a:rPr>
+              <a:t>secondString</a:t>
+            </a:r>
+            <a:r>
+              <a:rPr lang="en-US" dirty="0">
+                <a:latin typeface="Consolas" panose="020B0609020204030204" pitchFamily="49" charset="0"/>
+              </a:rPr>
+              <a:t> = “CSSE220”;</a:t>
+            </a:r>
+          </a:p>
+          <a:p>
+            <a:r>
+              <a:rPr lang="en-US" dirty="0">
+                <a:latin typeface="Consolas" panose="020B0609020204030204" pitchFamily="49" charset="0"/>
+              </a:rPr>
+              <a:t>String </a:t>
+            </a:r>
+            <a:r>
+              <a:rPr lang="en-US" dirty="0" err="1">
+                <a:latin typeface="Consolas" panose="020B0609020204030204" pitchFamily="49" charset="0"/>
+              </a:rPr>
+              <a:t>concatenatedResult</a:t>
+            </a:r>
+            <a:r>
+              <a:rPr lang="en-US" dirty="0">
+                <a:latin typeface="Consolas" panose="020B0609020204030204" pitchFamily="49" charset="0"/>
+              </a:rPr>
+              <a:t> = </a:t>
+            </a:r>
+            <a:r>
+              <a:rPr lang="en-US" dirty="0" err="1">
+                <a:latin typeface="Consolas" panose="020B0609020204030204" pitchFamily="49" charset="0"/>
+              </a:rPr>
+              <a:t>firstString</a:t>
+            </a:r>
+            <a:r>
+              <a:rPr lang="en-US" dirty="0">
+                <a:latin typeface="Consolas" panose="020B0609020204030204" pitchFamily="49" charset="0"/>
+              </a:rPr>
+              <a:t> + </a:t>
+            </a:r>
+            <a:r>
+              <a:rPr lang="en-US" dirty="0" err="1">
+                <a:latin typeface="Consolas" panose="020B0609020204030204" pitchFamily="49" charset="0"/>
+              </a:rPr>
+              <a:t>secondString</a:t>
+            </a:r>
+            <a:r>
+              <a:rPr lang="en-US" dirty="0">
+                <a:latin typeface="Consolas" panose="020B0609020204030204" pitchFamily="49" charset="0"/>
+              </a:rPr>
+              <a:t>;</a:t>
+            </a:r>
+          </a:p>
+          <a:p>
+            <a:r>
+              <a:rPr lang="en-US" dirty="0" err="1">
+                <a:latin typeface="Consolas" panose="020B0609020204030204" pitchFamily="49" charset="0"/>
+              </a:rPr>
+              <a:t>System.out.println</a:t>
+            </a:r>
+            <a:r>
+              <a:rPr lang="en-US" dirty="0">
+                <a:latin typeface="Consolas" panose="020B0609020204030204" pitchFamily="49" charset="0"/>
+              </a:rPr>
+              <a:t>(</a:t>
+            </a:r>
+            <a:r>
+              <a:rPr lang="en-US" dirty="0" err="1">
+                <a:latin typeface="Consolas" panose="020B0609020204030204" pitchFamily="49" charset="0"/>
+              </a:rPr>
+              <a:t>concatenatedResult</a:t>
+            </a:r>
+            <a:r>
+              <a:rPr lang="en-US" dirty="0">
+                <a:latin typeface="Consolas" panose="020B0609020204030204" pitchFamily="49" charset="0"/>
+              </a:rPr>
+              <a:t>);</a:t>
+            </a:r>
+          </a:p>
+          <a:p>
+            <a:r>
+              <a:rPr lang="en-US" dirty="0">
+                <a:latin typeface="Consolas" panose="020B0609020204030204" pitchFamily="49" charset="0"/>
+              </a:rPr>
+              <a:t>// Output: </a:t>
+            </a:r>
+            <a:br>
+              <a:rPr lang="en-US" dirty="0">
+                <a:latin typeface="Consolas" panose="020B0609020204030204" pitchFamily="49" charset="0"/>
+              </a:rPr>
+            </a:br>
+            <a:r>
+              <a:rPr lang="en-US" dirty="0">
+                <a:latin typeface="Consolas" panose="020B0609020204030204" pitchFamily="49" charset="0"/>
+              </a:rPr>
+              <a:t>// HelloCSSE220</a:t>
+            </a:r>
+          </a:p>
+        </p:txBody>
+      </p:sp>
+    </p:spTree>
+    <p:extLst>
+      <p:ext uri="{BB962C8B-B14F-4D97-AF65-F5344CB8AC3E}">
+        <p14:creationId xmlns:p14="http://schemas.microsoft.com/office/powerpoint/2010/main" val="339243289"/>
+      </p:ext>
+    </p:extLst>
+  </p:cSld>
+  <p:clrMapOvr>
+    <a:masterClrMapping/>
+  </p:clrMapOvr>
+</p:sld>
+</file>
+
+<file path=ppt/slides/slide6.xml><?xml version="1.0" encoding="utf-8"?>
+<p:sld xmlns:a="http://schemas.openxmlformats.org/drawingml/2006/main" xmlns:r="http://schemas.openxmlformats.org/officeDocument/2006/relationships" xmlns:p="http://schemas.openxmlformats.org/presentationml/2006/main">
+  <p:cSld>
+    <p:spTree>
+      <p:nvGrpSpPr>
+        <p:cNvPr id="1" name=""/>
+        <p:cNvGrpSpPr/>
+        <p:nvPr/>
+      </p:nvGrpSpPr>
+      <p:grpSpPr>
+        <a:xfrm>
+          <a:off x="0" y="0"/>
+          <a:ext cx="0" cy="0"/>
+          <a:chOff x="0" y="0"/>
+          <a:chExt cx="0" cy="0"/>
+        </a:xfrm>
+      </p:grpSpPr>
+      <p:sp>
+        <p:nvSpPr>
           <p:cNvPr id="72" name="Shape 72"/>
           <p:cNvSpPr>
             <a:spLocks noGrp="1"/>
@@ -5478,7 +6137,7 @@
 </p:sld>
 </file>
 
-<file path=ppt/slides/slide5.xml><?xml version="1.0" encoding="utf-8"?>
+<file path=ppt/slides/slide7.xml><?xml version="1.0" encoding="utf-8"?>
 <p:sld xmlns:a="http://schemas.openxmlformats.org/drawingml/2006/main" xmlns:r="http://schemas.openxmlformats.org/officeDocument/2006/relationships" xmlns:p="http://schemas.openxmlformats.org/presentationml/2006/main">
   <p:cSld>
     <p:spTree>
@@ -5603,7 +6262,7 @@
 </p:sld>
 </file>
 
-<file path=ppt/slides/slide6.xml><?xml version="1.0" encoding="utf-8"?>
+<file path=ppt/slides/slide8.xml><?xml version="1.0" encoding="utf-8"?>
 <p:sld xmlns:a="http://schemas.openxmlformats.org/drawingml/2006/main" xmlns:r="http://schemas.openxmlformats.org/officeDocument/2006/relationships" xmlns:p="http://schemas.openxmlformats.org/presentationml/2006/main">
   <p:cSld>
     <p:spTree>
@@ -5814,7 +6473,7 @@
 </p:sld>
 </file>
 
-<file path=ppt/slides/slide7.xml><?xml version="1.0" encoding="utf-8"?>
+<file path=ppt/slides/slide9.xml><?xml version="1.0" encoding="utf-8"?>
 <p:sld xmlns:a="http://schemas.openxmlformats.org/drawingml/2006/main" xmlns:r="http://schemas.openxmlformats.org/officeDocument/2006/relationships" xmlns:p="http://schemas.openxmlformats.org/presentationml/2006/main">
   <p:cSld>
     <p:spTree>
@@ -6748,6 +7407,12 @@
 </file>
 
 <file path=customXml/item1.xml><?xml version="1.0" encoding="utf-8"?>
+<p:properties xmlns:p="http://schemas.microsoft.com/office/2006/metadata/properties" xmlns:xsi="http://www.w3.org/2001/XMLSchema-instance" xmlns:pc="http://schemas.microsoft.com/office/infopath/2007/PartnerControls">
+  <documentManagement/>
+</p:properties>
+</file>
+
+<file path=customXml/item2.xml><?xml version="1.0" encoding="utf-8"?>
 <ct:contentTypeSchema xmlns:ct="http://schemas.microsoft.com/office/2006/metadata/contentType" xmlns:ma="http://schemas.microsoft.com/office/2006/metadata/properties/metaAttributes" ct:_="" ma:_="" ma:contentTypeName="Document" ma:contentTypeID="0x0101004285D81DBE5F5A448E892B34D6B8CF20" ma:contentTypeVersion="2" ma:contentTypeDescription="Create a new document." ma:contentTypeScope="" ma:versionID="026ccaf10de5d9915dfa48c6db16b59b">
   <xsd:schema xmlns:xsd="http://www.w3.org/2001/XMLSchema" xmlns:xs="http://www.w3.org/2001/XMLSchema" xmlns:p="http://schemas.microsoft.com/office/2006/metadata/properties" xmlns:ns2="08600313-7276-4ca7-b5d3-7d86193ee0ac" targetNamespace="http://schemas.microsoft.com/office/2006/metadata/properties" ma:root="true" ma:fieldsID="c887e4ee215f388544e22a2030d7ea35" ns2:_="">
     <xsd:import namespace="08600313-7276-4ca7-b5d3-7d86193ee0ac"/>
@@ -6879,12 +7544,6 @@
 </ct:contentTypeSchema>
 </file>
 
-<file path=customXml/item2.xml><?xml version="1.0" encoding="utf-8"?>
-<p:properties xmlns:p="http://schemas.microsoft.com/office/2006/metadata/properties" xmlns:xsi="http://www.w3.org/2001/XMLSchema-instance" xmlns:pc="http://schemas.microsoft.com/office/infopath/2007/PartnerControls">
-  <documentManagement/>
-</p:properties>
-</file>
-
 <file path=customXml/item3.xml><?xml version="1.0" encoding="utf-8"?>
 <?mso-contentType ?>
 <FormTemplates xmlns="http://schemas.microsoft.com/sharepoint/v3/contenttype/forms">
@@ -6895,6 +7554,22 @@
 </file>
 
 <file path=customXml/itemProps1.xml><?xml version="1.0" encoding="utf-8"?>
+<ds:datastoreItem xmlns:ds="http://schemas.openxmlformats.org/officeDocument/2006/customXml" ds:itemID="{F4E211C1-CD9D-46C8-BE98-ADF55AECFF6A}">
+  <ds:schemaRefs>
+    <ds:schemaRef ds:uri="79ddb764-415a-4c38-83b7-908be6382bea"/>
+    <ds:schemaRef ds:uri="http://purl.org/dc/dcmitype/"/>
+    <ds:schemaRef ds:uri="http://purl.org/dc/elements/1.1/"/>
+    <ds:schemaRef ds:uri="http://purl.org/dc/terms/"/>
+    <ds:schemaRef ds:uri="http://schemas.microsoft.com/office/2006/documentManagement/types"/>
+    <ds:schemaRef ds:uri="http://schemas.microsoft.com/office/2006/metadata/properties"/>
+    <ds:schemaRef ds:uri="http://schemas.microsoft.com/office/infopath/2007/PartnerControls"/>
+    <ds:schemaRef ds:uri="http://schemas.openxmlformats.org/package/2006/metadata/core-properties"/>
+    <ds:schemaRef ds:uri="http://www.w3.org/XML/1998/namespace"/>
+  </ds:schemaRefs>
+</ds:datastoreItem>
+</file>
+
+<file path=customXml/itemProps2.xml><?xml version="1.0" encoding="utf-8"?>
 <ds:datastoreItem xmlns:ds="http://schemas.openxmlformats.org/officeDocument/2006/customXml" ds:itemID="{FB830662-5179-45C5-B8BB-41FD5024BBF4}">
   <ds:schemaRefs>
     <ds:schemaRef ds:uri="http://schemas.microsoft.com/office/2006/metadata/contentType"/>
@@ -6912,22 +7587,6 @@
 </ds:datastoreItem>
 </file>
 
-<file path=customXml/itemProps2.xml><?xml version="1.0" encoding="utf-8"?>
-<ds:datastoreItem xmlns:ds="http://schemas.openxmlformats.org/officeDocument/2006/customXml" ds:itemID="{F4E211C1-CD9D-46C8-BE98-ADF55AECFF6A}">
-  <ds:schemaRefs>
-    <ds:schemaRef ds:uri="79ddb764-415a-4c38-83b7-908be6382bea"/>
-    <ds:schemaRef ds:uri="http://purl.org/dc/dcmitype/"/>
-    <ds:schemaRef ds:uri="http://purl.org/dc/elements/1.1/"/>
-    <ds:schemaRef ds:uri="http://purl.org/dc/terms/"/>
-    <ds:schemaRef ds:uri="http://schemas.microsoft.com/office/2006/documentManagement/types"/>
-    <ds:schemaRef ds:uri="http://schemas.microsoft.com/office/2006/metadata/properties"/>
-    <ds:schemaRef ds:uri="http://schemas.microsoft.com/office/infopath/2007/PartnerControls"/>
-    <ds:schemaRef ds:uri="http://schemas.openxmlformats.org/package/2006/metadata/core-properties"/>
-    <ds:schemaRef ds:uri="http://www.w3.org/XML/1998/namespace"/>
-  </ds:schemaRefs>
-</ds:datastoreItem>
-</file>
-
 <file path=customXml/itemProps3.xml><?xml version="1.0" encoding="utf-8"?>
 <ds:datastoreItem xmlns:ds="http://schemas.openxmlformats.org/officeDocument/2006/customXml" ds:itemID="{17FAF4A3-64B4-43E8-BB8B-B01EB9ECAC06}">
   <ds:schemaRefs>
